--- a/lecture_notes/introduction/introduction1.pptx
+++ b/lecture_notes/introduction/introduction1.pptx
@@ -124,6 +124,30 @@
 <file path=ppt/changesInfos/changesInfo1.xml><?xml version="1.0" encoding="utf-8"?>
 <pc:chgInfo xmlns:a="http://schemas.openxmlformats.org/drawingml/2006/main" xmlns:r="http://schemas.openxmlformats.org/officeDocument/2006/relationships" xmlns:ac="http://schemas.microsoft.com/office/drawing/2013/main/command" xmlns:pc="http://schemas.microsoft.com/office/powerpoint/2013/main/command">
   <pc:docChgLst>
+    <pc:chgData name="Toby Donaldson" userId="2e6e5431-bb17-4c41-9985-d39c50d83c73" providerId="ADAL" clId="{F31BC264-820E-54C4-A6D1-F92AF9CC222E}"/>
+    <pc:docChg chg="modSld">
+      <pc:chgData name="Toby Donaldson" userId="2e6e5431-bb17-4c41-9985-d39c50d83c73" providerId="ADAL" clId="{F31BC264-820E-54C4-A6D1-F92AF9CC222E}" dt="2026-09-09T16:27:48.795" v="3" actId="14100"/>
+      <pc:docMkLst>
+        <pc:docMk/>
+      </pc:docMkLst>
+      <pc:sldChg chg="addSp modSp mod">
+        <pc:chgData name="Toby Donaldson" userId="2e6e5431-bb17-4c41-9985-d39c50d83c73" providerId="ADAL" clId="{F31BC264-820E-54C4-A6D1-F92AF9CC222E}" dt="2026-09-09T16:27:48.795" v="3" actId="14100"/>
+        <pc:sldMkLst>
+          <pc:docMk/>
+          <pc:sldMk cId="4181702111" sldId="264"/>
+        </pc:sldMkLst>
+        <pc:picChg chg="add mod">
+          <ac:chgData name="Toby Donaldson" userId="2e6e5431-bb17-4c41-9985-d39c50d83c73" providerId="ADAL" clId="{F31BC264-820E-54C4-A6D1-F92AF9CC222E}" dt="2026-09-09T16:27:48.795" v="3" actId="14100"/>
+          <ac:picMkLst>
+            <pc:docMk/>
+            <pc:sldMk cId="4181702111" sldId="264"/>
+            <ac:picMk id="5" creationId="{00D17B86-7DF8-02B5-BA99-F2C426C2891A}"/>
+          </ac:picMkLst>
+        </pc:picChg>
+      </pc:sldChg>
+    </pc:docChg>
+  </pc:docChgLst>
+  <pc:docChgLst>
     <pc:chgData name="Toby Donaldson" userId="2e6e5431-bb17-4c41-9985-d39c50d83c73" providerId="ADAL" clId="{7F9681A8-EEE2-56F4-9B39-ECCBEE0471AC}"/>
     <pc:docChg chg="custSel delSld modSld">
       <pc:chgData name="Toby Donaldson" userId="2e6e5431-bb17-4c41-9985-d39c50d83c73" providerId="ADAL" clId="{7F9681A8-EEE2-56F4-9B39-ECCBEE0471AC}" dt="2026-09-08T00:20:31.414" v="94" actId="2696"/>
@@ -284,7 +308,7 @@
           <a:p>
             <a:fld id="{1C113DC9-7D87-43AD-B580-6A755EAA816A}" type="datetimeFigureOut">
               <a:rPr lang="en-AU" smtClean="0"/>
-              <a:t>7/9/2026</a:t>
+              <a:t>9/9/2026</a:t>
             </a:fld>
             <a:endParaRPr lang="en-AU"/>
           </a:p>
@@ -701,7 +725,7 @@
           <a:p>
             <a:fld id="{0538DAAF-C290-4824-9159-EB752B4BF898}" type="datetime1">
               <a:rPr lang="en-AU" smtClean="0"/>
-              <a:t>7/9/2026</a:t>
+              <a:t>9/9/2026</a:t>
             </a:fld>
             <a:endParaRPr lang="en-AU"/>
           </a:p>
@@ -901,7 +925,7 @@
           <a:p>
             <a:fld id="{15ACC07A-DCF9-4822-8432-94F5CEE4B1A0}" type="datetime1">
               <a:rPr lang="en-AU" smtClean="0"/>
-              <a:t>7/9/2026</a:t>
+              <a:t>9/9/2026</a:t>
             </a:fld>
             <a:endParaRPr lang="en-AU"/>
           </a:p>
@@ -1111,7 +1135,7 @@
           <a:p>
             <a:fld id="{BB95C53D-E3D6-403B-BC6B-9ED697E84E31}" type="datetime1">
               <a:rPr lang="en-AU" smtClean="0"/>
-              <a:t>7/9/2026</a:t>
+              <a:t>9/9/2026</a:t>
             </a:fld>
             <a:endParaRPr lang="en-AU"/>
           </a:p>
@@ -1311,7 +1335,7 @@
           <a:p>
             <a:fld id="{C59B9E26-7110-4384-9E21-C398F99CCE78}" type="datetime1">
               <a:rPr lang="en-AU" smtClean="0"/>
-              <a:t>7/9/2026</a:t>
+              <a:t>9/9/2026</a:t>
             </a:fld>
             <a:endParaRPr lang="en-AU"/>
           </a:p>
@@ -1587,7 +1611,7 @@
           <a:p>
             <a:fld id="{07AC0423-21DA-4A91-95A5-17BAC3DCB5A5}" type="datetime1">
               <a:rPr lang="en-AU" smtClean="0"/>
-              <a:t>7/9/2026</a:t>
+              <a:t>9/9/2026</a:t>
             </a:fld>
             <a:endParaRPr lang="en-AU"/>
           </a:p>
@@ -1855,7 +1879,7 @@
           <a:p>
             <a:fld id="{A8755B0B-71E5-4583-85D7-8827163EBC20}" type="datetime1">
               <a:rPr lang="en-AU" smtClean="0"/>
-              <a:t>7/9/2026</a:t>
+              <a:t>9/9/2026</a:t>
             </a:fld>
             <a:endParaRPr lang="en-AU"/>
           </a:p>
@@ -2270,7 +2294,7 @@
           <a:p>
             <a:fld id="{6963404A-06F3-40E5-885C-037A37B6014A}" type="datetime1">
               <a:rPr lang="en-AU" smtClean="0"/>
-              <a:t>7/9/2026</a:t>
+              <a:t>9/9/2026</a:t>
             </a:fld>
             <a:endParaRPr lang="en-AU"/>
           </a:p>
@@ -2412,7 +2436,7 @@
           <a:p>
             <a:fld id="{BC1958F0-3FBA-40FF-9385-A78B1569984B}" type="datetime1">
               <a:rPr lang="en-AU" smtClean="0"/>
-              <a:t>7/9/2026</a:t>
+              <a:t>9/9/2026</a:t>
             </a:fld>
             <a:endParaRPr lang="en-AU"/>
           </a:p>
@@ -2525,7 +2549,7 @@
           <a:p>
             <a:fld id="{A3B7F17C-B3FC-4389-A305-0B4BBC8F0EF4}" type="datetime1">
               <a:rPr lang="en-AU" smtClean="0"/>
-              <a:t>7/9/2026</a:t>
+              <a:t>9/9/2026</a:t>
             </a:fld>
             <a:endParaRPr lang="en-AU"/>
           </a:p>
@@ -2838,7 +2862,7 @@
           <a:p>
             <a:fld id="{6FDD59DF-D5B1-4318-A3EB-4195186F26F4}" type="datetime1">
               <a:rPr lang="en-AU" smtClean="0"/>
-              <a:t>7/9/2026</a:t>
+              <a:t>9/9/2026</a:t>
             </a:fld>
             <a:endParaRPr lang="en-AU"/>
           </a:p>
@@ -3127,7 +3151,7 @@
           <a:p>
             <a:fld id="{CC97ACB7-039E-498F-8E6F-59ECF6A0DE54}" type="datetime1">
               <a:rPr lang="en-AU" smtClean="0"/>
-              <a:t>7/9/2026</a:t>
+              <a:t>9/9/2026</a:t>
             </a:fld>
             <a:endParaRPr lang="en-AU"/>
           </a:p>
@@ -3370,7 +3394,7 @@
           <a:p>
             <a:fld id="{4D268183-BD0C-429A-BC43-106F40EDD5BB}" type="datetime1">
               <a:rPr lang="en-AU" smtClean="0"/>
-              <a:t>7/9/2026</a:t>
+              <a:t>9/9/2026</a:t>
             </a:fld>
             <a:endParaRPr lang="en-AU"/>
           </a:p>
@@ -4644,6 +4668,36 @@
           </a:p>
         </p:txBody>
       </p:sp>
+      <p:pic>
+        <p:nvPicPr>
+          <p:cNvPr id="5" name="Picture 4">
+            <a:extLst>
+              <a:ext uri="{FF2B5EF4-FFF2-40B4-BE49-F238E27FC236}">
+                <a16:creationId xmlns:a16="http://schemas.microsoft.com/office/drawing/2014/main" id="{00D17B86-7DF8-02B5-BA99-F2C426C2891A}"/>
+              </a:ext>
+            </a:extLst>
+          </p:cNvPr>
+          <p:cNvPicPr>
+            <a:picLocks noChangeAspect="1"/>
+          </p:cNvPicPr>
+          <p:nvPr/>
+        </p:nvPicPr>
+        <p:blipFill>
+          <a:blip r:embed="rId2"/>
+          <a:stretch>
+            <a:fillRect/>
+          </a:stretch>
+        </p:blipFill>
+        <p:spPr>
+          <a:xfrm>
+            <a:off x="7324920" y="4028541"/>
+            <a:ext cx="3566600" cy="2597931"/>
+          </a:xfrm>
+          <a:prstGeom prst="rect">
+            <a:avLst/>
+          </a:prstGeom>
+        </p:spPr>
+      </p:pic>
     </p:spTree>
     <p:extLst>
       <p:ext uri="{BB962C8B-B14F-4D97-AF65-F5344CB8AC3E}">
@@ -5758,4 +5812,10 @@
     </a:ext>
   </a:extLst>
 </a:theme>
+</file>
+
+<file path=docMetadata/LabelInfo.xml><?xml version="1.0" encoding="utf-8"?>
+<clbl:labelList xmlns:clbl="http://schemas.microsoft.com/office/2020/mipLabelMetadata">
+  <clbl:label id="{04e8677e-c989-47b9-8619-d83d5a5f6c67}" enabled="0" method="" siteId="{04e8677e-c989-47b9-8619-d83d5a5f6c67}" removed="1"/>
+</clbl:labelList>
 </file>